--- a/public/retrieval-list-it-template.pptx
+++ b/public/retrieval-list-it-template.pptx
@@ -2,13 +2,13 @@
 <file path=ppt/presentation.xml><?xml version="1.0" encoding="utf-8"?>
 <p:presentation xmlns:p="http://schemas.openxmlformats.org/presentationml/2006/main">
   <p:sldMasterIdLst>
-    <p:sldMasterId xmlns:r="http://schemas.openxmlformats.org/officeDocument/2006/relationships" id="2147483648" r:id="R373a93de9d1d4d9f"/>
+    <p:sldMasterId xmlns:r="http://schemas.openxmlformats.org/officeDocument/2006/relationships" id="2147483648" r:id="Rce47461a769d4d86"/>
   </p:sldMasterIdLst>
   <p:notesMasterIdLst>
-    <p:notesMasterId xmlns:r="http://schemas.openxmlformats.org/officeDocument/2006/relationships" r:id="Re5e4d1835de947b2"/>
+    <p:notesMasterId xmlns:r="http://schemas.openxmlformats.org/officeDocument/2006/relationships" r:id="R30ace8d63c5340dc"/>
   </p:notesMasterIdLst>
   <p:sldIdLst>
-    <p:sldId xmlns:r="http://schemas.openxmlformats.org/officeDocument/2006/relationships" id="256" r:id="R57a669ecad344f7a"/>
+    <p:sldId xmlns:r="http://schemas.openxmlformats.org/officeDocument/2006/relationships" id="256" r:id="R3c4cbccfbe9a4894"/>
   </p:sldIdLst>
   <p:sldSz cx="12192000" cy="6858000"/>
   <p:notesSz cx="6858000" cy="9144000"/>
@@ -442,7 +442,7 @@
           <a:lstStyle xmlns:a="http://schemas.openxmlformats.org/drawingml/2006/main"/>
           <a:p xmlns:a="http://schemas.openxmlformats.org/drawingml/2006/main">
             <a:r>
-              <a:t>Teacher setup: Replace bracketed text before teaching. Every text box is editable. Duplicate the slide for checked answers or a second prompt. Keep prompt and answer sides separate when printing cards.</a:t>
+              <a:t>Teacher setup: Replace bracketed text before teaching. All text and shapes are editable. Duplicate the slide for answers or another prompt. For card activities, separate prompt and answer sides before printing.</a:t>
             </a:r>
           </a:p>
           <a:p xmlns:a="http://schemas.openxmlformats.org/drawingml/2006/main">
@@ -452,17 +452,12 @@
           </a:p>
           <a:p xmlns:a="http://schemas.openxmlformats.org/drawingml/2006/main">
             <a:r>
-              <a:t>Activity: List it</a:t>
-            </a:r>
-          </a:p>
-          <a:p xmlns:a="http://schemas.openxmlformats.org/drawingml/2006/main">
-            <a:r>
               <a:t>Materials: Paper or mini whiteboards</a:t>
             </a:r>
           </a:p>
           <a:p xmlns:a="http://schemas.openxmlformats.org/drawingml/2006/main">
             <a:r>
-              <a:t>Suggested total time including feedback: 4 minutes.</a:t>
+              <a:t>Suggested time including feedback: 4 minutes.</a:t>
             </a:r>
           </a:p>
           <a:p xmlns:a="http://schemas.openxmlformats.org/drawingml/2006/main">
@@ -503,26 +498,6 @@
           <a:p xmlns:a="http://schemas.openxmlformats.org/drawingml/2006/main">
             <a:r>
               <a:t>Adapt: Set an achievable list length and offer narrower category cues.</a:t>
-            </a:r>
-          </a:p>
-          <a:p xmlns:a="http://schemas.openxmlformats.org/drawingml/2006/main">
-            <a:r>
-              <a:t>Credit: Shared focused-recall routine; TNT classroom adaptation</a:t>
-            </a:r>
-          </a:p>
-          <a:p xmlns:a="http://schemas.openxmlformats.org/drawingml/2006/main">
-            <a:r>
-              <a:t>No sole inventor is verified for this generic format. Its design follows cued-recall principles; it is not presented as a named researcher’s invention.</a:t>
-            </a:r>
-          </a:p>
-          <a:p xmlns:a="http://schemas.openxmlformats.org/drawingml/2006/main">
-            <a:r>
-              <a:t>Source: https://pdf.retrievalpractice.org/RetrievalPracticeGuide.pdf</a:t>
-            </a:r>
-          </a:p>
-          <a:p xmlns:a="http://schemas.openxmlformats.org/drawingml/2006/main">
-            <a:r>
-              <a:t>Full guide: https://tnt-teaching-tools.github.io/cold-call-classroom/retrieval-list-it.html</a:t>
             </a:r>
           </a:p>
         </p:txBody>
@@ -569,7 +544,7 @@
           <p:cNvPr id="4" name="Accent rule">
             <a:extLst xmlns:a="http://schemas.openxmlformats.org/drawingml/2006/main">
               <a:ext uri="{FF2B5EF4-FFF2-40B4-BE49-F238E27FC236}">
-                <a16:creationId xmlns:a16="http://schemas.microsoft.com/office/drawing/2014/main" id="{44BF82F3-BED4-4D14-8AFE-DD816FCAED23}"/>
+                <a16:creationId xmlns:a16="http://schemas.microsoft.com/office/drawing/2014/main" id="{3FC21D20-A2E5-4AD1-9D4B-891F24F7A048}"/>
               </a:ext>
             </a:extLst>
           </p:cNvPr>
@@ -600,7 +575,7 @@
           <p:cNvPr id="2" name="Title">
             <a:extLst xmlns:a="http://schemas.openxmlformats.org/drawingml/2006/main">
               <a:ext uri="{FF2B5EF4-FFF2-40B4-BE49-F238E27FC236}">
-                <a16:creationId xmlns:a16="http://schemas.microsoft.com/office/drawing/2014/main" id="{D6598F4D-6A78-438A-9195-5CEC751AA7FC}"/>
+                <a16:creationId xmlns:a16="http://schemas.microsoft.com/office/drawing/2014/main" id="{A3B27C3B-7402-4B63-9155-6F4730070615}"/>
               </a:ext>
             </a:extLst>
           </p:cNvPr>
@@ -747,7 +722,7 @@
           <p:cNvPr id="3" name="Subtitle">
             <a:extLst xmlns:a="http://schemas.openxmlformats.org/drawingml/2006/main">
               <a:ext uri="{FF2B5EF4-FFF2-40B4-BE49-F238E27FC236}">
-                <a16:creationId xmlns:a16="http://schemas.microsoft.com/office/drawing/2014/main" id="{2C7F78C3-594E-4CFE-8FBD-428BE0B3C670}"/>
+                <a16:creationId xmlns:a16="http://schemas.microsoft.com/office/drawing/2014/main" id="{13CA0CB0-DE72-4D81-A739-4289BDA3C67E}"/>
               </a:ext>
             </a:extLst>
           </p:cNvPr>
@@ -911,7 +886,7 @@
           <p:cNvPr id="3" name="Accent rule">
             <a:extLst xmlns:a="http://schemas.openxmlformats.org/drawingml/2006/main">
               <a:ext uri="{FF2B5EF4-FFF2-40B4-BE49-F238E27FC236}">
-                <a16:creationId xmlns:a16="http://schemas.microsoft.com/office/drawing/2014/main" id="{F3E1A40F-1639-4274-BDF2-E41D4107FCD6}"/>
+                <a16:creationId xmlns:a16="http://schemas.microsoft.com/office/drawing/2014/main" id="{E3509190-C50D-4C08-9D3E-E7B81BAF2DDC}"/>
               </a:ext>
             </a:extLst>
           </p:cNvPr>
@@ -942,7 +917,7 @@
           <p:cNvPr id="2" name="Section title">
             <a:extLst xmlns:a="http://schemas.openxmlformats.org/drawingml/2006/main">
               <a:ext uri="{FF2B5EF4-FFF2-40B4-BE49-F238E27FC236}">
-                <a16:creationId xmlns:a16="http://schemas.microsoft.com/office/drawing/2014/main" id="{F0676677-567B-4BCA-B5E6-7138292AD598}"/>
+                <a16:creationId xmlns:a16="http://schemas.microsoft.com/office/drawing/2014/main" id="{5B197579-0114-4BAF-BA2C-FD1014C67806}"/>
               </a:ext>
             </a:extLst>
           </p:cNvPr>
@@ -1106,7 +1081,7 @@
           <p:cNvPr id="4" name="Accent rule">
             <a:extLst xmlns:a="http://schemas.openxmlformats.org/drawingml/2006/main">
               <a:ext uri="{FF2B5EF4-FFF2-40B4-BE49-F238E27FC236}">
-                <a16:creationId xmlns:a16="http://schemas.microsoft.com/office/drawing/2014/main" id="{B5FF0748-FFF1-46F7-8CE5-04C4BA5D4D28}"/>
+                <a16:creationId xmlns:a16="http://schemas.microsoft.com/office/drawing/2014/main" id="{77F3E661-E9A6-42F8-BCDA-7717C550BFD9}"/>
               </a:ext>
             </a:extLst>
           </p:cNvPr>
@@ -1137,7 +1112,7 @@
           <p:cNvPr id="2" name="Title">
             <a:extLst xmlns:a="http://schemas.openxmlformats.org/drawingml/2006/main">
               <a:ext uri="{FF2B5EF4-FFF2-40B4-BE49-F238E27FC236}">
-                <a16:creationId xmlns:a16="http://schemas.microsoft.com/office/drawing/2014/main" id="{7EB7AA9A-70F2-40B5-A11A-2530CDEADA01}"/>
+                <a16:creationId xmlns:a16="http://schemas.microsoft.com/office/drawing/2014/main" id="{09E489EC-4BF8-4B4B-A587-4442C42B7D8A}"/>
               </a:ext>
             </a:extLst>
           </p:cNvPr>
@@ -1284,7 +1259,7 @@
           <p:cNvPr id="3" name="Body">
             <a:extLst xmlns:a="http://schemas.openxmlformats.org/drawingml/2006/main">
               <a:ext uri="{FF2B5EF4-FFF2-40B4-BE49-F238E27FC236}">
-                <a16:creationId xmlns:a16="http://schemas.microsoft.com/office/drawing/2014/main" id="{9E4E1449-6265-4EF0-9486-81402F3010A9}"/>
+                <a16:creationId xmlns:a16="http://schemas.microsoft.com/office/drawing/2014/main" id="{A7EBD289-AC67-469A-ACFC-52D56C718272}"/>
               </a:ext>
             </a:extLst>
           </p:cNvPr>
@@ -1448,7 +1423,7 @@
           <p:cNvPr id="5" name="Accent rule">
             <a:extLst xmlns:a="http://schemas.openxmlformats.org/drawingml/2006/main">
               <a:ext uri="{FF2B5EF4-FFF2-40B4-BE49-F238E27FC236}">
-                <a16:creationId xmlns:a16="http://schemas.microsoft.com/office/drawing/2014/main" id="{90921B17-4424-4615-A044-FBB4A54EDE60}"/>
+                <a16:creationId xmlns:a16="http://schemas.microsoft.com/office/drawing/2014/main" id="{5DDCAF0F-F3AA-415E-AAD6-E9CFE60DEF9A}"/>
               </a:ext>
             </a:extLst>
           </p:cNvPr>
@@ -1479,7 +1454,7 @@
           <p:cNvPr id="2" name="Title">
             <a:extLst xmlns:a="http://schemas.openxmlformats.org/drawingml/2006/main">
               <a:ext uri="{FF2B5EF4-FFF2-40B4-BE49-F238E27FC236}">
-                <a16:creationId xmlns:a16="http://schemas.microsoft.com/office/drawing/2014/main" id="{3A964776-F07A-4B70-99CF-43B613976691}"/>
+                <a16:creationId xmlns:a16="http://schemas.microsoft.com/office/drawing/2014/main" id="{9374BB95-F452-4CEA-8456-B17DBFDFD277}"/>
               </a:ext>
             </a:extLst>
           </p:cNvPr>
@@ -1626,7 +1601,7 @@
           <p:cNvPr id="3" name="Left column">
             <a:extLst xmlns:a="http://schemas.openxmlformats.org/drawingml/2006/main">
               <a:ext uri="{FF2B5EF4-FFF2-40B4-BE49-F238E27FC236}">
-                <a16:creationId xmlns:a16="http://schemas.microsoft.com/office/drawing/2014/main" id="{1928615A-0BC8-48D8-BBB1-038D19529694}"/>
+                <a16:creationId xmlns:a16="http://schemas.microsoft.com/office/drawing/2014/main" id="{7139A74E-B88A-4679-A31D-07B81CB109C3}"/>
               </a:ext>
             </a:extLst>
           </p:cNvPr>
@@ -1773,7 +1748,7 @@
           <p:cNvPr id="4" name="Right column">
             <a:extLst xmlns:a="http://schemas.openxmlformats.org/drawingml/2006/main">
               <a:ext uri="{FF2B5EF4-FFF2-40B4-BE49-F238E27FC236}">
-                <a16:creationId xmlns:a16="http://schemas.microsoft.com/office/drawing/2014/main" id="{74E1D686-FCF4-44A5-BFBE-9ED7B6EBBE96}"/>
+                <a16:creationId xmlns:a16="http://schemas.microsoft.com/office/drawing/2014/main" id="{8043F0DB-FEED-42C9-A463-7B44DA12C074}"/>
               </a:ext>
             </a:extLst>
           </p:cNvPr>
@@ -1937,7 +1912,7 @@
           <p:cNvPr id="4" name="Accent rule">
             <a:extLst xmlns:a="http://schemas.openxmlformats.org/drawingml/2006/main">
               <a:ext uri="{FF2B5EF4-FFF2-40B4-BE49-F238E27FC236}">
-                <a16:creationId xmlns:a16="http://schemas.microsoft.com/office/drawing/2014/main" id="{40D6369F-0C73-4B70-8F08-2A6B2E162FAE}"/>
+                <a16:creationId xmlns:a16="http://schemas.microsoft.com/office/drawing/2014/main" id="{460CB639-DDFB-48B9-9B03-904C3CF104E9}"/>
               </a:ext>
             </a:extLst>
           </p:cNvPr>
@@ -1968,7 +1943,7 @@
           <p:cNvPr id="2" name="Title">
             <a:extLst xmlns:a="http://schemas.openxmlformats.org/drawingml/2006/main">
               <a:ext uri="{FF2B5EF4-FFF2-40B4-BE49-F238E27FC236}">
-                <a16:creationId xmlns:a16="http://schemas.microsoft.com/office/drawing/2014/main" id="{6836C024-F91D-45C0-88F2-6F570C7A7313}"/>
+                <a16:creationId xmlns:a16="http://schemas.microsoft.com/office/drawing/2014/main" id="{0FFDF23B-7F0F-41EB-8078-CFFBC6475FAF}"/>
               </a:ext>
             </a:extLst>
           </p:cNvPr>
@@ -2115,7 +2090,7 @@
           <p:cNvPr id="3" name="Left column">
             <a:extLst xmlns:a="http://schemas.openxmlformats.org/drawingml/2006/main">
               <a:ext uri="{FF2B5EF4-FFF2-40B4-BE49-F238E27FC236}">
-                <a16:creationId xmlns:a16="http://schemas.microsoft.com/office/drawing/2014/main" id="{E4E4ED4D-22A9-4B60-B583-CD80412AF6E1}"/>
+                <a16:creationId xmlns:a16="http://schemas.microsoft.com/office/drawing/2014/main" id="{DB09DB9D-E86B-44A9-95B7-B06C2AD9C44C}"/>
               </a:ext>
             </a:extLst>
           </p:cNvPr>
@@ -2300,12 +2275,12 @@
   </p:cSld>
   <p:clrMap bg1="lt1" tx1="dk1" bg2="lt2" tx2="dk2" accent1="accent1" accent2="accent2" accent3="accent3" accent4="accent4" accent5="accent5" accent6="accent6" hlink="hlink" folHlink="folHlink"/>
   <p:sldLayoutIdLst>
-    <p:sldLayoutId xmlns:r="http://schemas.openxmlformats.org/officeDocument/2006/relationships" id="2147483649" r:id="Rda387153e661483d"/>
-    <p:sldLayoutId xmlns:r="http://schemas.openxmlformats.org/officeDocument/2006/relationships" id="2147483650" r:id="Rc262e5b1dadc4443"/>
-    <p:sldLayoutId xmlns:r="http://schemas.openxmlformats.org/officeDocument/2006/relationships" id="2147483651" r:id="R12ec8bdd0e514fb4"/>
-    <p:sldLayoutId xmlns:r="http://schemas.openxmlformats.org/officeDocument/2006/relationships" id="2147483652" r:id="Re44420a3c8ff4bca"/>
-    <p:sldLayoutId xmlns:r="http://schemas.openxmlformats.org/officeDocument/2006/relationships" id="2147483653" r:id="R80d4bcf952fc4628"/>
-    <p:sldLayoutId xmlns:r="http://schemas.openxmlformats.org/officeDocument/2006/relationships" id="2147483654" r:id="R7dbd33da48694936"/>
+    <p:sldLayoutId xmlns:r="http://schemas.openxmlformats.org/officeDocument/2006/relationships" id="2147483649" r:id="Rf9f19dcf167d49e1"/>
+    <p:sldLayoutId xmlns:r="http://schemas.openxmlformats.org/officeDocument/2006/relationships" id="2147483650" r:id="R9fcc7855236a43b6"/>
+    <p:sldLayoutId xmlns:r="http://schemas.openxmlformats.org/officeDocument/2006/relationships" id="2147483651" r:id="R4df7c45b81e14996"/>
+    <p:sldLayoutId xmlns:r="http://schemas.openxmlformats.org/officeDocument/2006/relationships" id="2147483652" r:id="R7a4b3237791941cc"/>
+    <p:sldLayoutId xmlns:r="http://schemas.openxmlformats.org/officeDocument/2006/relationships" id="2147483653" r:id="Rd60cecc6b0334026"/>
+    <p:sldLayoutId xmlns:r="http://schemas.openxmlformats.org/officeDocument/2006/relationships" id="2147483654" r:id="Rbedd536d1d0b4fb0"/>
   </p:sldLayoutIdLst>
   <p:txStyles>
     <p:titleStyle>
@@ -2838,7 +2813,7 @@
     <p:bg>
       <p:bgPr>
         <a:solidFill xmlns:a="http://schemas.openxmlformats.org/drawingml/2006/main">
-          <a:srgbClr val="FFFCF2"/>
+          <a:srgbClr val="FFFDF5"/>
         </a:solidFill>
       </p:bgPr>
     </p:bg>
@@ -2853,10 +2828,10 @@
       </p:grpSpPr>
       <p:sp>
         <p:nvSpPr>
-          <p:cNvPr id="8" name="">
+          <p:cNvPr id="15" name="">
             <a:extLst xmlns:a="http://schemas.openxmlformats.org/drawingml/2006/main">
               <a:ext uri="{FF2B5EF4-FFF2-40B4-BE49-F238E27FC236}">
-                <a16:creationId xmlns:a16="http://schemas.microsoft.com/office/drawing/2014/main" id="{69D5C7DD-AE59-4AE7-A120-5C2443FDA798}"/>
+                <a16:creationId xmlns:a16="http://schemas.microsoft.com/office/drawing/2014/main" id="{963D06FF-FE27-4F5D-8E35-0ACC837C76C4}"/>
               </a:ext>
             </a:extLst>
           </p:cNvPr>
@@ -2867,235 +2842,7 @@
         </p:nvSpPr>
         <p:spPr>
           <a:xfrm xmlns:a="http://schemas.openxmlformats.org/drawingml/2006/main">
-            <a:off x="609600" y="333375"/>
-            <a:ext cx="10972800" cy="714375"/>
-          </a:xfrm>
-          <a:prstGeom xmlns:a="http://schemas.openxmlformats.org/drawingml/2006/main" prst="rect">
-            <a:avLst/>
-          </a:prstGeom>
-          <a:noFill xmlns:a="http://schemas.openxmlformats.org/drawingml/2006/main"/>
-          <a:ln xmlns:a="http://schemas.openxmlformats.org/drawingml/2006/main" w="0">
-            <a:noFill/>
-          </a:ln>
-        </p:spPr>
-        <p:txBody>
-          <a:bodyPr xmlns:a="http://schemas.openxmlformats.org/drawingml/2006/main" lIns="0" tIns="0" rIns="0" bIns="0" anchor="t">
-            <a:noAutofit/>
-          </a:bodyPr>
-          <a:lstStyle xmlns:a="http://schemas.openxmlformats.org/drawingml/2006/main"/>
-          <a:p xmlns:a="http://schemas.openxmlformats.org/drawingml/2006/main">
-            <a:pPr>
-              <a:defRPr sz="4050" b="1">
-                <a:solidFill>
-                  <a:srgbClr val="242720"/>
-                </a:solidFill>
-                <a:latin typeface="Arial"/>
-                <a:ea typeface="Arial"/>
-                <a:cs typeface="Arial"/>
-              </a:defRPr>
-            </a:pPr>
-            <a:r>
-              <a:rPr sz="4050" b="1">
-                <a:solidFill>
-                  <a:srgbClr val="242720"/>
-                </a:solidFill>
-                <a:latin typeface="Arial"/>
-                <a:ea typeface="Arial"/>
-                <a:cs typeface="Arial"/>
-              </a:rPr>
-              <a:t>List it</a:t>
-            </a:r>
-          </a:p>
-        </p:txBody>
-      </p:sp>
-      <p:sp>
-        <p:nvSpPr>
-          <p:cNvPr id="2" name="">
-            <a:extLst xmlns:a="http://schemas.openxmlformats.org/drawingml/2006/main">
-              <a:ext uri="{FF2B5EF4-FFF2-40B4-BE49-F238E27FC236}">
-                <a16:creationId xmlns:a16="http://schemas.microsoft.com/office/drawing/2014/main" id="{D484821D-80CA-4972-8D20-5B86691D4DB9}"/>
-              </a:ext>
-            </a:extLst>
-          </p:cNvPr>
-          <p:cNvSpPr>
-            <a:spLocks xmlns:a="http://schemas.openxmlformats.org/drawingml/2006/main" noGrp="1"/>
-          </p:cNvSpPr>
-          <p:nvPr/>
-        </p:nvSpPr>
-        <p:spPr>
-          <a:xfrm xmlns:a="http://schemas.openxmlformats.org/drawingml/2006/main">
-            <a:off x="609600" y="1190625"/>
-            <a:ext cx="10972800" cy="476250"/>
-          </a:xfrm>
-          <a:prstGeom xmlns:a="http://schemas.openxmlformats.org/drawingml/2006/main" prst="rect">
-            <a:avLst/>
-          </a:prstGeom>
-          <a:noFill xmlns:a="http://schemas.openxmlformats.org/drawingml/2006/main"/>
-          <a:ln xmlns:a="http://schemas.openxmlformats.org/drawingml/2006/main" w="0">
-            <a:noFill/>
-          </a:ln>
-        </p:spPr>
-        <p:txBody>
-          <a:bodyPr xmlns:a="http://schemas.openxmlformats.org/drawingml/2006/main" lIns="0" tIns="0" rIns="0" bIns="0" anchor="t">
-            <a:noAutofit/>
-          </a:bodyPr>
-          <a:lstStyle xmlns:a="http://schemas.openxmlformats.org/drawingml/2006/main"/>
-          <a:p xmlns:a="http://schemas.openxmlformats.org/drawingml/2006/main">
-            <a:pPr>
-              <a:defRPr sz="2400" b="0">
-                <a:solidFill>
-                  <a:srgbClr val="242720"/>
-                </a:solidFill>
-                <a:latin typeface="Arial"/>
-                <a:ea typeface="Arial"/>
-                <a:cs typeface="Arial"/>
-              </a:defRPr>
-            </a:pPr>
-            <a:r>
-              <a:rPr sz="2400" b="0">
-                <a:solidFill>
-                  <a:srgbClr val="242720"/>
-                </a:solidFill>
-                <a:latin typeface="Arial"/>
-                <a:ea typeface="Arial"/>
-                <a:cs typeface="Arial"/>
-              </a:rPr>
-              <a:t>[Add your topic or retrieval focus]</a:t>
-            </a:r>
-          </a:p>
-        </p:txBody>
-      </p:sp>
-      <p:sp>
-        <p:nvSpPr>
-          <p:cNvPr id="3" name="">
-            <a:extLst xmlns:a="http://schemas.openxmlformats.org/drawingml/2006/main">
-              <a:ext uri="{FF2B5EF4-FFF2-40B4-BE49-F238E27FC236}">
-                <a16:creationId xmlns:a16="http://schemas.microsoft.com/office/drawing/2014/main" id="{CB32BBFC-EB71-47ED-A816-A82F13A78D8A}"/>
-              </a:ext>
-            </a:extLst>
-          </p:cNvPr>
-          <p:cNvSpPr>
-            <a:spLocks xmlns:a="http://schemas.openxmlformats.org/drawingml/2006/main" noGrp="1"/>
-          </p:cNvSpPr>
-          <p:nvPr/>
-        </p:nvSpPr>
-        <p:spPr>
-          <a:xfrm xmlns:a="http://schemas.openxmlformats.org/drawingml/2006/main">
-            <a:off x="609600" y="1733550"/>
-            <a:ext cx="10972800" cy="400050"/>
-          </a:xfrm>
-          <a:prstGeom xmlns:a="http://schemas.openxmlformats.org/drawingml/2006/main" prst="rect">
-            <a:avLst/>
-          </a:prstGeom>
-          <a:noFill xmlns:a="http://schemas.openxmlformats.org/drawingml/2006/main"/>
-          <a:ln xmlns:a="http://schemas.openxmlformats.org/drawingml/2006/main" w="0">
-            <a:noFill/>
-          </a:ln>
-        </p:spPr>
-        <p:txBody>
-          <a:bodyPr xmlns:a="http://schemas.openxmlformats.org/drawingml/2006/main" lIns="0" tIns="0" rIns="0" bIns="0" anchor="t">
-            <a:noAutofit/>
-          </a:bodyPr>
-          <a:lstStyle xmlns:a="http://schemas.openxmlformats.org/drawingml/2006/main"/>
-          <a:p xmlns:a="http://schemas.openxmlformats.org/drawingml/2006/main">
-            <a:pPr>
-              <a:defRPr sz="1800" b="0">
-                <a:solidFill>
-                  <a:srgbClr val="28534A"/>
-                </a:solidFill>
-                <a:latin typeface="Arial"/>
-                <a:ea typeface="Arial"/>
-                <a:cs typeface="Arial"/>
-              </a:defRPr>
-            </a:pPr>
-            <a:r>
-              <a:rPr sz="1800" b="0">
-                <a:solidFill>
-                  <a:srgbClr val="28534A"/>
-                </a:solidFill>
-                <a:latin typeface="Arial"/>
-                <a:ea typeface="Arial"/>
-                <a:cs typeface="Arial"/>
-              </a:rPr>
-              <a:t>Recall independently first. Check and improve after feedback.</a:t>
-            </a:r>
-          </a:p>
-        </p:txBody>
-      </p:sp>
-      <p:sp>
-        <p:nvSpPr>
-          <p:cNvPr id="4" name="">
-            <a:extLst xmlns:a="http://schemas.openxmlformats.org/drawingml/2006/main">
-              <a:ext uri="{FF2B5EF4-FFF2-40B4-BE49-F238E27FC236}">
-                <a16:creationId xmlns:a16="http://schemas.microsoft.com/office/drawing/2014/main" id="{8BB0E696-D5E6-4A95-A2D7-1E04443E3808}"/>
-              </a:ext>
-            </a:extLst>
-          </p:cNvPr>
-          <p:cNvSpPr>
-            <a:spLocks xmlns:a="http://schemas.openxmlformats.org/drawingml/2006/main" noGrp="1"/>
-          </p:cNvSpPr>
-          <p:nvPr/>
-        </p:nvSpPr>
-        <p:spPr>
-          <a:xfrm xmlns:a="http://schemas.openxmlformats.org/drawingml/2006/main">
-            <a:off x="609600" y="2571750"/>
-            <a:ext cx="10972800" cy="1714500"/>
-          </a:xfrm>
-          <a:prstGeom xmlns:a="http://schemas.openxmlformats.org/drawingml/2006/main" prst="rect">
-            <a:avLst/>
-          </a:prstGeom>
-          <a:noFill xmlns:a="http://schemas.openxmlformats.org/drawingml/2006/main"/>
-          <a:ln xmlns:a="http://schemas.openxmlformats.org/drawingml/2006/main" w="0">
-            <a:noFill/>
-          </a:ln>
-        </p:spPr>
-        <p:txBody>
-          <a:bodyPr xmlns:a="http://schemas.openxmlformats.org/drawingml/2006/main" lIns="0" tIns="0" rIns="0" bIns="0" anchor="t">
-            <a:noAutofit/>
-          </a:bodyPr>
-          <a:lstStyle xmlns:a="http://schemas.openxmlformats.org/drawingml/2006/main"/>
-          <a:p xmlns:a="http://schemas.openxmlformats.org/drawingml/2006/main">
-            <a:pPr>
-              <a:defRPr sz="2700" b="1">
-                <a:solidFill>
-                  <a:srgbClr val="242720"/>
-                </a:solidFill>
-                <a:latin typeface="Arial"/>
-                <a:ea typeface="Arial"/>
-                <a:cs typeface="Arial"/>
-              </a:defRPr>
-            </a:pPr>
-            <a:r>
-              <a:rPr sz="2700" b="1">
-                <a:solidFill>
-                  <a:srgbClr val="242720"/>
-                </a:solidFill>
-                <a:latin typeface="Arial"/>
-                <a:ea typeface="Arial"/>
-                <a:cs typeface="Arial"/>
-              </a:rPr>
-              <a:t>[Add a category and an achievable list length]</a:t>
-            </a:r>
-          </a:p>
-        </p:txBody>
-      </p:sp>
-      <p:sp>
-        <p:nvSpPr>
-          <p:cNvPr id="5" name="">
-            <a:extLst xmlns:a="http://schemas.openxmlformats.org/drawingml/2006/main">
-              <a:ext uri="{FF2B5EF4-FFF2-40B4-BE49-F238E27FC236}">
-                <a16:creationId xmlns:a16="http://schemas.microsoft.com/office/drawing/2014/main" id="{82447306-21F3-4455-A7A3-ADA588887E71}"/>
-              </a:ext>
-            </a:extLst>
-          </p:cNvPr>
-          <p:cNvSpPr>
-            <a:spLocks xmlns:a="http://schemas.openxmlformats.org/drawingml/2006/main" noGrp="1"/>
-          </p:cNvSpPr>
-          <p:nvPr/>
-        </p:nvSpPr>
-        <p:spPr>
-          <a:xfrm xmlns:a="http://schemas.openxmlformats.org/drawingml/2006/main">
-            <a:off x="609600" y="4762500"/>
+            <a:off x="609600" y="323850"/>
             <a:ext cx="10972800" cy="666750"/>
           </a:xfrm>
           <a:prstGeom xmlns:a="http://schemas.openxmlformats.org/drawingml/2006/main" prst="rect">
@@ -3113,35 +2860,35 @@
           <a:lstStyle xmlns:a="http://schemas.openxmlformats.org/drawingml/2006/main"/>
           <a:p xmlns:a="http://schemas.openxmlformats.org/drawingml/2006/main">
             <a:pPr>
-              <a:defRPr sz="2250" b="0">
+              <a:defRPr sz="3450" b="1">
                 <a:solidFill>
-                  <a:srgbClr val="242720"/>
+                  <a:srgbClr val="263C3A"/>
                 </a:solidFill>
-                <a:latin typeface="Arial"/>
-                <a:ea typeface="Arial"/>
-                <a:cs typeface="Arial"/>
+                <a:latin typeface="DejaVu Sans"/>
+                <a:ea typeface="DejaVu Sans"/>
+                <a:cs typeface="DejaVu Sans"/>
               </a:defRPr>
             </a:pPr>
             <a:r>
-              <a:rPr sz="2250" b="0">
+              <a:rPr sz="3450" b="1">
                 <a:solidFill>
-                  <a:srgbClr val="242720"/>
+                  <a:srgbClr val="263C3A"/>
                 </a:solidFill>
-                <a:latin typeface="Arial"/>
-                <a:ea typeface="Arial"/>
-                <a:cs typeface="Arial"/>
+                <a:latin typeface="DejaVu Sans"/>
+                <a:ea typeface="DejaVu Sans"/>
+                <a:cs typeface="DejaVu Sans"/>
               </a:rPr>
-              <a:t>Explain why one item belongs in the category.</a:t>
+              <a:t>List it</a:t>
             </a:r>
           </a:p>
         </p:txBody>
       </p:sp>
       <p:sp>
         <p:nvSpPr>
-          <p:cNvPr id="6" name="">
+          <p:cNvPr id="2" name="">
             <a:extLst xmlns:a="http://schemas.openxmlformats.org/drawingml/2006/main">
               <a:ext uri="{FF2B5EF4-FFF2-40B4-BE49-F238E27FC236}">
-                <a16:creationId xmlns:a16="http://schemas.microsoft.com/office/drawing/2014/main" id="{80173359-EF16-455E-9863-4FDBD921DB8C}"/>
+                <a16:creationId xmlns:a16="http://schemas.microsoft.com/office/drawing/2014/main" id="{DA594F3A-B946-44DB-A0BB-D776DA6D8D24}"/>
               </a:ext>
             </a:extLst>
           </p:cNvPr>
@@ -3152,8 +2899,8 @@
         </p:nvSpPr>
         <p:spPr>
           <a:xfrm xmlns:a="http://schemas.openxmlformats.org/drawingml/2006/main">
-            <a:off x="609600" y="5953125"/>
-            <a:ext cx="10972800" cy="381000"/>
+            <a:off x="609600" y="1085850"/>
+            <a:ext cx="10972800" cy="409575"/>
           </a:xfrm>
           <a:prstGeom xmlns:a="http://schemas.openxmlformats.org/drawingml/2006/main" prst="rect">
             <a:avLst/>
@@ -3170,35 +2917,35 @@
           <a:lstStyle xmlns:a="http://schemas.openxmlformats.org/drawingml/2006/main"/>
           <a:p xmlns:a="http://schemas.openxmlformats.org/drawingml/2006/main">
             <a:pPr>
-              <a:defRPr sz="1800" b="0">
+              <a:defRPr sz="2175" b="0">
                 <a:solidFill>
-                  <a:srgbClr val="28534A"/>
+                  <a:srgbClr val="687572"/>
                 </a:solidFill>
-                <a:latin typeface="Arial"/>
-                <a:ea typeface="Arial"/>
-                <a:cs typeface="Arial"/>
+                <a:latin typeface="DejaVu Sans"/>
+                <a:ea typeface="DejaVu Sans"/>
+                <a:cs typeface="DejaVu Sans"/>
               </a:defRPr>
             </a:pPr>
             <a:r>
-              <a:rPr sz="1800" b="0">
+              <a:rPr sz="2175" b="0">
                 <a:solidFill>
-                  <a:srgbClr val="28534A"/>
+                  <a:srgbClr val="687572"/>
                 </a:solidFill>
-                <a:latin typeface="Arial"/>
-                <a:ea typeface="Arial"/>
-                <a:cs typeface="Arial"/>
+                <a:latin typeface="DejaVu Sans"/>
+                <a:ea typeface="DejaVu Sans"/>
+                <a:cs typeface="DejaVu Sans"/>
               </a:rPr>
-              <a:t>Time: [Add minutes]     Check: [Add your feedback routine]</a:t>
+              <a:t>[Your topic or retrieval focus]</a:t>
             </a:r>
           </a:p>
         </p:txBody>
       </p:sp>
       <p:sp>
         <p:nvSpPr>
-          <p:cNvPr id="7" name="">
+          <p:cNvPr id="3" name="">
             <a:extLst xmlns:a="http://schemas.openxmlformats.org/drawingml/2006/main">
               <a:ext uri="{FF2B5EF4-FFF2-40B4-BE49-F238E27FC236}">
-                <a16:creationId xmlns:a16="http://schemas.microsoft.com/office/drawing/2014/main" id="{20C4CAB5-111D-44D2-8499-A314502B0440}"/>
+                <a16:creationId xmlns:a16="http://schemas.microsoft.com/office/drawing/2014/main" id="{46FB5E9C-8190-4082-93A3-C6033CB01FB5}"/>
               </a:ext>
             </a:extLst>
           </p:cNvPr>
@@ -3209,8 +2956,38 @@
         </p:nvSpPr>
         <p:spPr>
           <a:xfrm xmlns:a="http://schemas.openxmlformats.org/drawingml/2006/main">
-            <a:off x="609600" y="6534150"/>
-            <a:ext cx="10972800" cy="209550"/>
+            <a:off x="609600" y="1676400"/>
+            <a:ext cx="10972800" cy="19050"/>
+          </a:xfrm>
+          <a:prstGeom xmlns:a="http://schemas.openxmlformats.org/drawingml/2006/main" prst="rect">
+            <a:avLst/>
+          </a:prstGeom>
+          <a:solidFill xmlns:a="http://schemas.openxmlformats.org/drawingml/2006/main">
+            <a:srgbClr val="A9BDB7"/>
+          </a:solidFill>
+          <a:ln xmlns:a="http://schemas.openxmlformats.org/drawingml/2006/main" w="0">
+            <a:noFill/>
+          </a:ln>
+        </p:spPr>
+      </p:sp>
+      <p:sp>
+        <p:nvSpPr>
+          <p:cNvPr id="4" name="">
+            <a:extLst xmlns:a="http://schemas.openxmlformats.org/drawingml/2006/main">
+              <a:ext uri="{FF2B5EF4-FFF2-40B4-BE49-F238E27FC236}">
+                <a16:creationId xmlns:a16="http://schemas.microsoft.com/office/drawing/2014/main" id="{A7595DD5-28CE-49E1-B71B-20CC3EA7F6AF}"/>
+              </a:ext>
+            </a:extLst>
+          </p:cNvPr>
+          <p:cNvSpPr>
+            <a:spLocks xmlns:a="http://schemas.openxmlformats.org/drawingml/2006/main" noGrp="1"/>
+          </p:cNvSpPr>
+          <p:nvPr/>
+        </p:nvSpPr>
+        <p:spPr>
+          <a:xfrm xmlns:a="http://schemas.openxmlformats.org/drawingml/2006/main">
+            <a:off x="609600" y="1828800"/>
+            <a:ext cx="4476750" cy="304800"/>
           </a:xfrm>
           <a:prstGeom xmlns:a="http://schemas.openxmlformats.org/drawingml/2006/main" prst="rect">
             <a:avLst/>
@@ -3227,25 +3004,516 @@
           <a:lstStyle xmlns:a="http://schemas.openxmlformats.org/drawingml/2006/main"/>
           <a:p xmlns:a="http://schemas.openxmlformats.org/drawingml/2006/main">
             <a:pPr>
-              <a:defRPr sz="1050" b="0">
+              <a:defRPr sz="1575" b="1">
                 <a:solidFill>
-                  <a:srgbClr val="62675C"/>
+                  <a:srgbClr val="263C3A"/>
                 </a:solidFill>
-                <a:latin typeface="Arial"/>
-                <a:ea typeface="Arial"/>
-                <a:cs typeface="Arial"/>
+                <a:latin typeface="DejaVu Sans"/>
+                <a:ea typeface="DejaVu Sans"/>
+                <a:cs typeface="DejaVu Sans"/>
               </a:defRPr>
             </a:pPr>
             <a:r>
-              <a:rPr sz="1050" b="0">
+              <a:rPr sz="1575" b="1">
                 <a:solidFill>
-                  <a:srgbClr val="62675C"/>
+                  <a:srgbClr val="263C3A"/>
                 </a:solidFill>
-                <a:latin typeface="Arial"/>
-                <a:ea typeface="Arial"/>
-                <a:cs typeface="Arial"/>
+                <a:latin typeface="DejaVu Sans"/>
+                <a:ea typeface="DejaVu Sans"/>
+                <a:cs typeface="DejaVu Sans"/>
               </a:rPr>
-              <a:t>TNT Teaching Tools   Editable classroom template   Source and teacher guidance in speaker notes</a:t>
+              <a:t>01  Recall from memory</a:t>
+            </a:r>
+          </a:p>
+        </p:txBody>
+      </p:sp>
+      <p:sp>
+        <p:nvSpPr>
+          <p:cNvPr id="5" name="">
+            <a:extLst xmlns:a="http://schemas.openxmlformats.org/drawingml/2006/main">
+              <a:ext uri="{FF2B5EF4-FFF2-40B4-BE49-F238E27FC236}">
+                <a16:creationId xmlns:a16="http://schemas.microsoft.com/office/drawing/2014/main" id="{93E4BB7B-ACD4-4444-8186-22012E7D6A6A}"/>
+              </a:ext>
+            </a:extLst>
+          </p:cNvPr>
+          <p:cNvSpPr>
+            <a:spLocks xmlns:a="http://schemas.openxmlformats.org/drawingml/2006/main" noGrp="1"/>
+          </p:cNvSpPr>
+          <p:nvPr/>
+        </p:nvSpPr>
+        <p:spPr>
+          <a:xfrm xmlns:a="http://schemas.openxmlformats.org/drawingml/2006/main">
+            <a:off x="6286500" y="1828800"/>
+            <a:ext cx="5048250" cy="304800"/>
+          </a:xfrm>
+          <a:prstGeom xmlns:a="http://schemas.openxmlformats.org/drawingml/2006/main" prst="rect">
+            <a:avLst/>
+          </a:prstGeom>
+          <a:noFill xmlns:a="http://schemas.openxmlformats.org/drawingml/2006/main"/>
+          <a:ln xmlns:a="http://schemas.openxmlformats.org/drawingml/2006/main" w="0">
+            <a:noFill/>
+          </a:ln>
+        </p:spPr>
+        <p:txBody>
+          <a:bodyPr xmlns:a="http://schemas.openxmlformats.org/drawingml/2006/main" lIns="0" tIns="0" rIns="0" bIns="0" anchor="t">
+            <a:noAutofit/>
+          </a:bodyPr>
+          <a:lstStyle xmlns:a="http://schemas.openxmlformats.org/drawingml/2006/main"/>
+          <a:p xmlns:a="http://schemas.openxmlformats.org/drawingml/2006/main">
+            <a:pPr>
+              <a:defRPr sz="1575" b="1">
+                <a:solidFill>
+                  <a:srgbClr val="263C3A"/>
+                </a:solidFill>
+                <a:latin typeface="DejaVu Sans"/>
+                <a:ea typeface="DejaVu Sans"/>
+                <a:cs typeface="DejaVu Sans"/>
+              </a:defRPr>
+            </a:pPr>
+            <a:r>
+              <a:rPr sz="1575" b="1">
+                <a:solidFill>
+                  <a:srgbClr val="263C3A"/>
+                </a:solidFill>
+                <a:latin typeface="DejaVu Sans"/>
+                <a:ea typeface="DejaVu Sans"/>
+                <a:cs typeface="DejaVu Sans"/>
+              </a:rPr>
+              <a:t>02  Check and improve</a:t>
+            </a:r>
+          </a:p>
+        </p:txBody>
+      </p:sp>
+      <p:sp>
+        <p:nvSpPr>
+          <p:cNvPr id="6" name="">
+            <a:extLst xmlns:a="http://schemas.openxmlformats.org/drawingml/2006/main">
+              <a:ext uri="{FF2B5EF4-FFF2-40B4-BE49-F238E27FC236}">
+                <a16:creationId xmlns:a16="http://schemas.microsoft.com/office/drawing/2014/main" id="{4DBEF3D1-68C1-42EC-B742-891CDACA73D6}"/>
+              </a:ext>
+            </a:extLst>
+          </p:cNvPr>
+          <p:cNvSpPr>
+            <a:spLocks xmlns:a="http://schemas.openxmlformats.org/drawingml/2006/main" noGrp="1"/>
+          </p:cNvSpPr>
+          <p:nvPr/>
+        </p:nvSpPr>
+        <p:spPr>
+          <a:xfrm xmlns:a="http://schemas.openxmlformats.org/drawingml/2006/main">
+            <a:off x="609600" y="2247900"/>
+            <a:ext cx="10972800" cy="2762250"/>
+          </a:xfrm>
+          <a:prstGeom xmlns:a="http://schemas.openxmlformats.org/drawingml/2006/main" prst="rect">
+            <a:avLst/>
+          </a:prstGeom>
+          <a:solidFill xmlns:a="http://schemas.openxmlformats.org/drawingml/2006/main">
+            <a:srgbClr val="EDF2F5"/>
+          </a:solidFill>
+          <a:ln xmlns:a="http://schemas.openxmlformats.org/drawingml/2006/main" w="9525">
+            <a:solidFill>
+              <a:srgbClr val="D4DFDB"/>
+            </a:solidFill>
+          </a:ln>
+        </p:spPr>
+      </p:sp>
+      <p:sp>
+        <p:nvSpPr>
+          <p:cNvPr id="7" name="">
+            <a:extLst xmlns:a="http://schemas.openxmlformats.org/drawingml/2006/main">
+              <a:ext uri="{FF2B5EF4-FFF2-40B4-BE49-F238E27FC236}">
+                <a16:creationId xmlns:a16="http://schemas.microsoft.com/office/drawing/2014/main" id="{06333F9B-9EF7-40CB-A74C-8A9BFE249E24}"/>
+              </a:ext>
+            </a:extLst>
+          </p:cNvPr>
+          <p:cNvSpPr>
+            <a:spLocks xmlns:a="http://schemas.openxmlformats.org/drawingml/2006/main" noGrp="1"/>
+          </p:cNvSpPr>
+          <p:nvPr/>
+        </p:nvSpPr>
+        <p:spPr>
+          <a:xfrm xmlns:a="http://schemas.openxmlformats.org/drawingml/2006/main">
+            <a:off x="800100" y="2419350"/>
+            <a:ext cx="381000" cy="381000"/>
+          </a:xfrm>
+          <a:prstGeom xmlns:a="http://schemas.openxmlformats.org/drawingml/2006/main" prst="ellipse">
+            <a:avLst/>
+          </a:prstGeom>
+          <a:solidFill xmlns:a="http://schemas.openxmlformats.org/drawingml/2006/main">
+            <a:srgbClr val="FFFFFF"/>
+          </a:solidFill>
+          <a:ln xmlns:a="http://schemas.openxmlformats.org/drawingml/2006/main" w="0">
+            <a:noFill/>
+          </a:ln>
+        </p:spPr>
+      </p:sp>
+      <p:sp>
+        <p:nvSpPr>
+          <p:cNvPr id="8" name="">
+            <a:extLst xmlns:a="http://schemas.openxmlformats.org/drawingml/2006/main">
+              <a:ext uri="{FF2B5EF4-FFF2-40B4-BE49-F238E27FC236}">
+                <a16:creationId xmlns:a16="http://schemas.microsoft.com/office/drawing/2014/main" id="{F5B50C09-D064-4BBE-8F78-A8BF22E30107}"/>
+              </a:ext>
+            </a:extLst>
+          </p:cNvPr>
+          <p:cNvSpPr>
+            <a:spLocks xmlns:a="http://schemas.openxmlformats.org/drawingml/2006/main" noGrp="1"/>
+          </p:cNvSpPr>
+          <p:nvPr/>
+        </p:nvSpPr>
+        <p:spPr>
+          <a:xfrm xmlns:a="http://schemas.openxmlformats.org/drawingml/2006/main">
+            <a:off x="857250" y="2486025"/>
+            <a:ext cx="342900" cy="285750"/>
+          </a:xfrm>
+          <a:prstGeom xmlns:a="http://schemas.openxmlformats.org/drawingml/2006/main" prst="rect">
+            <a:avLst/>
+          </a:prstGeom>
+          <a:noFill xmlns:a="http://schemas.openxmlformats.org/drawingml/2006/main"/>
+          <a:ln xmlns:a="http://schemas.openxmlformats.org/drawingml/2006/main" w="0">
+            <a:noFill/>
+          </a:ln>
+        </p:spPr>
+        <p:txBody>
+          <a:bodyPr xmlns:a="http://schemas.openxmlformats.org/drawingml/2006/main" lIns="0" tIns="0" rIns="0" bIns="0" anchor="t">
+            <a:noAutofit/>
+          </a:bodyPr>
+          <a:lstStyle xmlns:a="http://schemas.openxmlformats.org/drawingml/2006/main"/>
+          <a:p xmlns:a="http://schemas.openxmlformats.org/drawingml/2006/main">
+            <a:pPr>
+              <a:defRPr sz="1350" b="1">
+                <a:solidFill>
+                  <a:srgbClr val="263C3A"/>
+                </a:solidFill>
+                <a:latin typeface="DejaVu Sans"/>
+                <a:ea typeface="DejaVu Sans"/>
+                <a:cs typeface="DejaVu Sans"/>
+              </a:defRPr>
+            </a:pPr>
+            <a:r>
+              <a:rPr sz="1350" b="1">
+                <a:solidFill>
+                  <a:srgbClr val="263C3A"/>
+                </a:solidFill>
+                <a:latin typeface="DejaVu Sans"/>
+                <a:ea typeface="DejaVu Sans"/>
+                <a:cs typeface="DejaVu Sans"/>
+              </a:rPr>
+              <a:t>01</a:t>
+            </a:r>
+          </a:p>
+        </p:txBody>
+      </p:sp>
+      <p:sp>
+        <p:nvSpPr>
+          <p:cNvPr id="9" name="">
+            <a:extLst xmlns:a="http://schemas.openxmlformats.org/drawingml/2006/main">
+              <a:ext uri="{FF2B5EF4-FFF2-40B4-BE49-F238E27FC236}">
+                <a16:creationId xmlns:a16="http://schemas.microsoft.com/office/drawing/2014/main" id="{BC2E88F5-7ABD-43E0-89BB-50B470923054}"/>
+              </a:ext>
+            </a:extLst>
+          </p:cNvPr>
+          <p:cNvSpPr>
+            <a:spLocks xmlns:a="http://schemas.openxmlformats.org/drawingml/2006/main" noGrp="1"/>
+          </p:cNvSpPr>
+          <p:nvPr/>
+        </p:nvSpPr>
+        <p:spPr>
+          <a:xfrm xmlns:a="http://schemas.openxmlformats.org/drawingml/2006/main">
+            <a:off x="1352550" y="2466975"/>
+            <a:ext cx="10039350" cy="428625"/>
+          </a:xfrm>
+          <a:prstGeom xmlns:a="http://schemas.openxmlformats.org/drawingml/2006/main" prst="rect">
+            <a:avLst/>
+          </a:prstGeom>
+          <a:noFill xmlns:a="http://schemas.openxmlformats.org/drawingml/2006/main"/>
+          <a:ln xmlns:a="http://schemas.openxmlformats.org/drawingml/2006/main" w="0">
+            <a:noFill/>
+          </a:ln>
+        </p:spPr>
+        <p:txBody>
+          <a:bodyPr xmlns:a="http://schemas.openxmlformats.org/drawingml/2006/main" lIns="0" tIns="0" rIns="0" bIns="0" anchor="t">
+            <a:noAutofit/>
+          </a:bodyPr>
+          <a:lstStyle xmlns:a="http://schemas.openxmlformats.org/drawingml/2006/main"/>
+          <a:p xmlns:a="http://schemas.openxmlformats.org/drawingml/2006/main">
+            <a:pPr>
+              <a:defRPr sz="1725" b="1">
+                <a:solidFill>
+                  <a:srgbClr val="263C3A"/>
+                </a:solidFill>
+                <a:latin typeface="DejaVu Sans"/>
+                <a:ea typeface="DejaVu Sans"/>
+                <a:cs typeface="DejaVu Sans"/>
+              </a:defRPr>
+            </a:pPr>
+            <a:r>
+              <a:rPr sz="1725" b="1">
+                <a:solidFill>
+                  <a:srgbClr val="263C3A"/>
+                </a:solidFill>
+                <a:latin typeface="DejaVu Sans"/>
+                <a:ea typeface="DejaVu Sans"/>
+                <a:cs typeface="DejaVu Sans"/>
+              </a:rPr>
+              <a:t>What belongs in the list?</a:t>
+            </a:r>
+          </a:p>
+        </p:txBody>
+      </p:sp>
+      <p:sp>
+        <p:nvSpPr>
+          <p:cNvPr id="10" name="">
+            <a:extLst xmlns:a="http://schemas.openxmlformats.org/drawingml/2006/main">
+              <a:ext uri="{FF2B5EF4-FFF2-40B4-BE49-F238E27FC236}">
+                <a16:creationId xmlns:a16="http://schemas.microsoft.com/office/drawing/2014/main" id="{6A7DA54D-29F7-4752-9B66-F63A2554510D}"/>
+              </a:ext>
+            </a:extLst>
+          </p:cNvPr>
+          <p:cNvSpPr>
+            <a:spLocks xmlns:a="http://schemas.openxmlformats.org/drawingml/2006/main" noGrp="1"/>
+          </p:cNvSpPr>
+          <p:nvPr/>
+        </p:nvSpPr>
+        <p:spPr>
+          <a:xfrm xmlns:a="http://schemas.openxmlformats.org/drawingml/2006/main">
+            <a:off x="819150" y="2990850"/>
+            <a:ext cx="10553700" cy="1857375"/>
+          </a:xfrm>
+          <a:prstGeom xmlns:a="http://schemas.openxmlformats.org/drawingml/2006/main" prst="rect">
+            <a:avLst/>
+          </a:prstGeom>
+          <a:noFill xmlns:a="http://schemas.openxmlformats.org/drawingml/2006/main"/>
+          <a:ln xmlns:a="http://schemas.openxmlformats.org/drawingml/2006/main" w="0">
+            <a:noFill/>
+          </a:ln>
+        </p:spPr>
+        <p:txBody>
+          <a:bodyPr xmlns:a="http://schemas.openxmlformats.org/drawingml/2006/main" lIns="0" tIns="0" rIns="0" bIns="0" anchor="t">
+            <a:noAutofit/>
+          </a:bodyPr>
+          <a:lstStyle xmlns:a="http://schemas.openxmlformats.org/drawingml/2006/main"/>
+          <a:p xmlns:a="http://schemas.openxmlformats.org/drawingml/2006/main">
+            <a:pPr>
+              <a:defRPr sz="1950" b="0">
+                <a:solidFill>
+                  <a:srgbClr val="687572"/>
+                </a:solidFill>
+                <a:latin typeface="DejaVu Sans"/>
+                <a:ea typeface="DejaVu Sans"/>
+                <a:cs typeface="DejaVu Sans"/>
+              </a:defRPr>
+            </a:pPr>
+            <a:r>
+              <a:rPr sz="1950" b="0">
+                <a:solidFill>
+                  <a:srgbClr val="687572"/>
+                </a:solidFill>
+                <a:latin typeface="DejaVu Sans"/>
+                <a:ea typeface="DejaVu Sans"/>
+                <a:cs typeface="DejaVu Sans"/>
+              </a:rPr>
+              <a:t>[Your category and list length]</a:t>
+            </a:r>
+          </a:p>
+        </p:txBody>
+      </p:sp>
+      <p:sp>
+        <p:nvSpPr>
+          <p:cNvPr id="11" name="">
+            <a:extLst xmlns:a="http://schemas.openxmlformats.org/drawingml/2006/main">
+              <a:ext uri="{FF2B5EF4-FFF2-40B4-BE49-F238E27FC236}">
+                <a16:creationId xmlns:a16="http://schemas.microsoft.com/office/drawing/2014/main" id="{13F4E7BF-2896-4D61-92FF-9AC32000B67F}"/>
+              </a:ext>
+            </a:extLst>
+          </p:cNvPr>
+          <p:cNvSpPr>
+            <a:spLocks xmlns:a="http://schemas.openxmlformats.org/drawingml/2006/main" noGrp="1"/>
+          </p:cNvSpPr>
+          <p:nvPr/>
+        </p:nvSpPr>
+        <p:spPr>
+          <a:xfrm xmlns:a="http://schemas.openxmlformats.org/drawingml/2006/main">
+            <a:off x="609600" y="5267325"/>
+            <a:ext cx="10972800" cy="438150"/>
+          </a:xfrm>
+          <a:prstGeom xmlns:a="http://schemas.openxmlformats.org/drawingml/2006/main" prst="rect">
+            <a:avLst/>
+          </a:prstGeom>
+          <a:noFill xmlns:a="http://schemas.openxmlformats.org/drawingml/2006/main"/>
+          <a:ln xmlns:a="http://schemas.openxmlformats.org/drawingml/2006/main" w="0">
+            <a:noFill/>
+          </a:ln>
+        </p:spPr>
+        <p:txBody>
+          <a:bodyPr xmlns:a="http://schemas.openxmlformats.org/drawingml/2006/main" lIns="0" tIns="0" rIns="0" bIns="0" anchor="t">
+            <a:noAutofit/>
+          </a:bodyPr>
+          <a:lstStyle xmlns:a="http://schemas.openxmlformats.org/drawingml/2006/main"/>
+          <a:p xmlns:a="http://schemas.openxmlformats.org/drawingml/2006/main">
+            <a:pPr>
+              <a:defRPr sz="1950" b="0">
+                <a:solidFill>
+                  <a:srgbClr val="263C3A"/>
+                </a:solidFill>
+                <a:latin typeface="DejaVu Sans"/>
+                <a:ea typeface="DejaVu Sans"/>
+                <a:cs typeface="DejaVu Sans"/>
+              </a:defRPr>
+            </a:pPr>
+            <a:r>
+              <a:rPr sz="1950" b="0">
+                <a:solidFill>
+                  <a:srgbClr val="263C3A"/>
+                </a:solidFill>
+                <a:latin typeface="DejaVu Sans"/>
+                <a:ea typeface="DejaVu Sans"/>
+                <a:cs typeface="DejaVu Sans"/>
+              </a:rPr>
+              <a:t>Choose one item and explain why it belongs.</a:t>
+            </a:r>
+          </a:p>
+        </p:txBody>
+      </p:sp>
+      <p:sp>
+        <p:nvSpPr>
+          <p:cNvPr id="12" name="">
+            <a:extLst xmlns:a="http://schemas.openxmlformats.org/drawingml/2006/main">
+              <a:ext uri="{FF2B5EF4-FFF2-40B4-BE49-F238E27FC236}">
+                <a16:creationId xmlns:a16="http://schemas.microsoft.com/office/drawing/2014/main" id="{B7588ABF-666A-4415-A390-417D86B8C5DA}"/>
+              </a:ext>
+            </a:extLst>
+          </p:cNvPr>
+          <p:cNvSpPr>
+            <a:spLocks xmlns:a="http://schemas.openxmlformats.org/drawingml/2006/main" noGrp="1"/>
+          </p:cNvSpPr>
+          <p:nvPr/>
+        </p:nvSpPr>
+        <p:spPr>
+          <a:xfrm xmlns:a="http://schemas.openxmlformats.org/drawingml/2006/main">
+            <a:off x="609600" y="5953125"/>
+            <a:ext cx="10972800" cy="9525"/>
+          </a:xfrm>
+          <a:prstGeom xmlns:a="http://schemas.openxmlformats.org/drawingml/2006/main" prst="rect">
+            <a:avLst/>
+          </a:prstGeom>
+          <a:solidFill xmlns:a="http://schemas.openxmlformats.org/drawingml/2006/main">
+            <a:srgbClr val="A9BDB7"/>
+          </a:solidFill>
+          <a:ln xmlns:a="http://schemas.openxmlformats.org/drawingml/2006/main" w="0">
+            <a:noFill/>
+          </a:ln>
+        </p:spPr>
+      </p:sp>
+      <p:sp>
+        <p:nvSpPr>
+          <p:cNvPr id="13" name="">
+            <a:extLst xmlns:a="http://schemas.openxmlformats.org/drawingml/2006/main">
+              <a:ext uri="{FF2B5EF4-FFF2-40B4-BE49-F238E27FC236}">
+                <a16:creationId xmlns:a16="http://schemas.microsoft.com/office/drawing/2014/main" id="{DC911196-2EDC-4A44-A047-4985817A9C73}"/>
+              </a:ext>
+            </a:extLst>
+          </p:cNvPr>
+          <p:cNvSpPr>
+            <a:spLocks xmlns:a="http://schemas.openxmlformats.org/drawingml/2006/main" noGrp="1"/>
+          </p:cNvSpPr>
+          <p:nvPr/>
+        </p:nvSpPr>
+        <p:spPr>
+          <a:xfrm xmlns:a="http://schemas.openxmlformats.org/drawingml/2006/main">
+            <a:off x="609600" y="6191250"/>
+            <a:ext cx="3238500" cy="361950"/>
+          </a:xfrm>
+          <a:prstGeom xmlns:a="http://schemas.openxmlformats.org/drawingml/2006/main" prst="rect">
+            <a:avLst/>
+          </a:prstGeom>
+          <a:noFill xmlns:a="http://schemas.openxmlformats.org/drawingml/2006/main"/>
+          <a:ln xmlns:a="http://schemas.openxmlformats.org/drawingml/2006/main" w="0">
+            <a:noFill/>
+          </a:ln>
+        </p:spPr>
+        <p:txBody>
+          <a:bodyPr xmlns:a="http://schemas.openxmlformats.org/drawingml/2006/main" lIns="0" tIns="0" rIns="0" bIns="0" anchor="t">
+            <a:noAutofit/>
+          </a:bodyPr>
+          <a:lstStyle xmlns:a="http://schemas.openxmlformats.org/drawingml/2006/main"/>
+          <a:p xmlns:a="http://schemas.openxmlformats.org/drawingml/2006/main">
+            <a:pPr>
+              <a:defRPr sz="1650" b="0">
+                <a:solidFill>
+                  <a:srgbClr val="687572"/>
+                </a:solidFill>
+                <a:latin typeface="DejaVu Sans"/>
+                <a:ea typeface="DejaVu Sans"/>
+                <a:cs typeface="DejaVu Sans"/>
+              </a:defRPr>
+            </a:pPr>
+            <a:r>
+              <a:rPr sz="1650" b="0">
+                <a:solidFill>
+                  <a:srgbClr val="687572"/>
+                </a:solidFill>
+                <a:latin typeface="DejaVu Sans"/>
+                <a:ea typeface="DejaVu Sans"/>
+                <a:cs typeface="DejaVu Sans"/>
+              </a:rPr>
+              <a:t>Time: [Minutes]</a:t>
+            </a:r>
+          </a:p>
+        </p:txBody>
+      </p:sp>
+      <p:sp>
+        <p:nvSpPr>
+          <p:cNvPr id="14" name="">
+            <a:extLst xmlns:a="http://schemas.openxmlformats.org/drawingml/2006/main">
+              <a:ext uri="{FF2B5EF4-FFF2-40B4-BE49-F238E27FC236}">
+                <a16:creationId xmlns:a16="http://schemas.microsoft.com/office/drawing/2014/main" id="{F5D69847-F0A2-4629-8FDC-D92DCB622DCE}"/>
+              </a:ext>
+            </a:extLst>
+          </p:cNvPr>
+          <p:cNvSpPr>
+            <a:spLocks xmlns:a="http://schemas.openxmlformats.org/drawingml/2006/main" noGrp="1"/>
+          </p:cNvSpPr>
+          <p:nvPr/>
+        </p:nvSpPr>
+        <p:spPr>
+          <a:xfrm xmlns:a="http://schemas.openxmlformats.org/drawingml/2006/main">
+            <a:off x="4286250" y="6191250"/>
+            <a:ext cx="7296150" cy="361950"/>
+          </a:xfrm>
+          <a:prstGeom xmlns:a="http://schemas.openxmlformats.org/drawingml/2006/main" prst="rect">
+            <a:avLst/>
+          </a:prstGeom>
+          <a:noFill xmlns:a="http://schemas.openxmlformats.org/drawingml/2006/main"/>
+          <a:ln xmlns:a="http://schemas.openxmlformats.org/drawingml/2006/main" w="0">
+            <a:noFill/>
+          </a:ln>
+        </p:spPr>
+        <p:txBody>
+          <a:bodyPr xmlns:a="http://schemas.openxmlformats.org/drawingml/2006/main" lIns="0" tIns="0" rIns="0" bIns="0" anchor="t">
+            <a:noAutofit/>
+          </a:bodyPr>
+          <a:lstStyle xmlns:a="http://schemas.openxmlformats.org/drawingml/2006/main"/>
+          <a:p xmlns:a="http://schemas.openxmlformats.org/drawingml/2006/main">
+            <a:pPr>
+              <a:defRPr sz="1650" b="0">
+                <a:solidFill>
+                  <a:srgbClr val="687572"/>
+                </a:solidFill>
+                <a:latin typeface="DejaVu Sans"/>
+                <a:ea typeface="DejaVu Sans"/>
+                <a:cs typeface="DejaVu Sans"/>
+              </a:defRPr>
+            </a:pPr>
+            <a:r>
+              <a:rPr sz="1650" b="0">
+                <a:solidFill>
+                  <a:srgbClr val="687572"/>
+                </a:solidFill>
+                <a:latin typeface="DejaVu Sans"/>
+                <a:ea typeface="DejaVu Sans"/>
+                <a:cs typeface="DejaVu Sans"/>
+              </a:rPr>
+              <a:t>Feedback: [Your checking routine]</a:t>
             </a:r>
           </a:p>
         </p:txBody>
@@ -3253,7 +3521,7 @@
     </p:spTree>
     <p:extLst>
       <p:ext uri="{BB962C8B-B14F-4D97-AF65-F5344CB8AC3E}">
-        <p14:creationId xmlns:p14="http://schemas.microsoft.com/office/powerpoint/2010/main" val="723450825"/>
+        <p14:creationId xmlns:p14="http://schemas.microsoft.com/office/powerpoint/2010/main" val="1451680170"/>
       </p:ext>
     </p:extLst>
   </p:cSld>
